--- a/I_Cloud Computing.pptx
+++ b/I_Cloud Computing.pptx
@@ -221,7 +221,7 @@
           <a:p>
             <a:fld id="{E3AAD89A-DE75-490E-B3B8-DA645685EB5B}" type="datetimeFigureOut">
               <a:rPr lang="en-US" smtClean="0"/>
-              <a:t>8/25/2025</a:t>
+              <a:t>9/1/2025</a:t>
             </a:fld>
             <a:endParaRPr lang="en-US"/>
           </a:p>
@@ -557,11 +557,7 @@
             </a:pPr>
             <a:r>
               <a:rPr lang="en-US" dirty="0" smtClean="0"/>
-              <a:t>https://</a:t>
-            </a:r>
-            <a:r>
-              <a:rPr lang="en-US" dirty="0" smtClean="0"/>
-              <a:t>docs.openstack.org/liberty/install-guide-rdo/overview.html</a:t>
+              <a:t>https://docs.openstack.org/liberty/install-guide-rdo/overview.html</a:t>
             </a:r>
           </a:p>
           <a:p>
@@ -766,7 +762,6 @@
               <a:rPr lang="en-US" dirty="0" smtClean="0"/>
               <a:t> 3. https://www.ibm.com/topics/cloud-computing4. https://csrc.nist.gov/pubs/sp/800/145/final</a:t>
             </a:r>
-            <a:endParaRPr lang="en-US" dirty="0" smtClean="0"/>
           </a:p>
           <a:p>
             <a:endParaRPr lang="en-US" dirty="0"/>
@@ -3565,7 +3560,7 @@
           <a:p>
             <a:fld id="{B6D41BCC-AD73-4203-A5A6-E62EB28B0FE6}" type="datetimeFigureOut">
               <a:rPr lang="en-US" smtClean="0"/>
-              <a:t>8/25/2025</a:t>
+              <a:t>9/1/2025</a:t>
             </a:fld>
             <a:endParaRPr lang="en-US"/>
           </a:p>
@@ -3735,7 +3730,7 @@
           <a:p>
             <a:fld id="{B6D41BCC-AD73-4203-A5A6-E62EB28B0FE6}" type="datetimeFigureOut">
               <a:rPr lang="en-US" smtClean="0"/>
-              <a:t>8/25/2025</a:t>
+              <a:t>9/1/2025</a:t>
             </a:fld>
             <a:endParaRPr lang="en-US"/>
           </a:p>
@@ -3915,7 +3910,7 @@
           <a:p>
             <a:fld id="{B6D41BCC-AD73-4203-A5A6-E62EB28B0FE6}" type="datetimeFigureOut">
               <a:rPr lang="en-US" smtClean="0"/>
-              <a:t>8/25/2025</a:t>
+              <a:t>9/1/2025</a:t>
             </a:fld>
             <a:endParaRPr lang="en-US"/>
           </a:p>
@@ -4085,7 +4080,7 @@
           <a:p>
             <a:fld id="{B6D41BCC-AD73-4203-A5A6-E62EB28B0FE6}" type="datetimeFigureOut">
               <a:rPr lang="en-US" smtClean="0"/>
-              <a:t>8/25/2025</a:t>
+              <a:t>9/1/2025</a:t>
             </a:fld>
             <a:endParaRPr lang="en-US"/>
           </a:p>
@@ -4331,7 +4326,7 @@
           <a:p>
             <a:fld id="{B6D41BCC-AD73-4203-A5A6-E62EB28B0FE6}" type="datetimeFigureOut">
               <a:rPr lang="en-US" smtClean="0"/>
-              <a:t>8/25/2025</a:t>
+              <a:t>9/1/2025</a:t>
             </a:fld>
             <a:endParaRPr lang="en-US"/>
           </a:p>
@@ -4563,7 +4558,7 @@
           <a:p>
             <a:fld id="{B6D41BCC-AD73-4203-A5A6-E62EB28B0FE6}" type="datetimeFigureOut">
               <a:rPr lang="en-US" smtClean="0"/>
-              <a:t>8/25/2025</a:t>
+              <a:t>9/1/2025</a:t>
             </a:fld>
             <a:endParaRPr lang="en-US"/>
           </a:p>
@@ -4930,7 +4925,7 @@
           <a:p>
             <a:fld id="{B6D41BCC-AD73-4203-A5A6-E62EB28B0FE6}" type="datetimeFigureOut">
               <a:rPr lang="en-US" smtClean="0"/>
-              <a:t>8/25/2025</a:t>
+              <a:t>9/1/2025</a:t>
             </a:fld>
             <a:endParaRPr lang="en-US"/>
           </a:p>
@@ -5048,7 +5043,7 @@
           <a:p>
             <a:fld id="{B6D41BCC-AD73-4203-A5A6-E62EB28B0FE6}" type="datetimeFigureOut">
               <a:rPr lang="en-US" smtClean="0"/>
-              <a:t>8/25/2025</a:t>
+              <a:t>9/1/2025</a:t>
             </a:fld>
             <a:endParaRPr lang="en-US"/>
           </a:p>
@@ -5143,7 +5138,7 @@
           <a:p>
             <a:fld id="{B6D41BCC-AD73-4203-A5A6-E62EB28B0FE6}" type="datetimeFigureOut">
               <a:rPr lang="en-US" smtClean="0"/>
-              <a:t>8/25/2025</a:t>
+              <a:t>9/1/2025</a:t>
             </a:fld>
             <a:endParaRPr lang="en-US"/>
           </a:p>
@@ -5420,7 +5415,7 @@
           <a:p>
             <a:fld id="{B6D41BCC-AD73-4203-A5A6-E62EB28B0FE6}" type="datetimeFigureOut">
               <a:rPr lang="en-US" smtClean="0"/>
-              <a:t>8/25/2025</a:t>
+              <a:t>9/1/2025</a:t>
             </a:fld>
             <a:endParaRPr lang="en-US"/>
           </a:p>
@@ -5673,7 +5668,7 @@
           <a:p>
             <a:fld id="{B6D41BCC-AD73-4203-A5A6-E62EB28B0FE6}" type="datetimeFigureOut">
               <a:rPr lang="en-US" smtClean="0"/>
-              <a:t>8/25/2025</a:t>
+              <a:t>9/1/2025</a:t>
             </a:fld>
             <a:endParaRPr lang="en-US"/>
           </a:p>
@@ -5887,7 +5882,7 @@
             <a:fld id="{B6D41BCC-AD73-4203-A5A6-E62EB28B0FE6}" type="datetimeFigureOut">
               <a:rPr lang="en-US" smtClean="0"/>
               <a:pPr/>
-              <a:t>8/25/2025</a:t>
+              <a:t>9/1/2025</a:t>
             </a:fld>
             <a:endParaRPr lang="en-US"/>
           </a:p>
@@ -8126,6 +8121,35 @@
           </a:p>
         </p:txBody>
       </p:sp>
+      <p:sp>
+        <p:nvSpPr>
+          <p:cNvPr id="24" name="Rectangle 23"/>
+          <p:cNvSpPr/>
+          <p:nvPr/>
+        </p:nvSpPr>
+        <p:spPr>
+          <a:xfrm>
+            <a:off x="7493791" y="6381215"/>
+            <a:ext cx="4698209" cy="276999"/>
+          </a:xfrm>
+          <a:prstGeom prst="rect">
+            <a:avLst/>
+          </a:prstGeom>
+        </p:spPr>
+        <p:txBody>
+          <a:bodyPr wrap="none">
+            <a:spAutoFit/>
+          </a:bodyPr>
+          <a:lstStyle/>
+          <a:p>
+            <a:r>
+              <a:rPr lang="en-US" sz="1200" dirty="0"/>
+              <a:t>https://github.com/amelcharolinesgn2/ClouD-Infrastructure-SISKA-2025</a:t>
+            </a:r>
+            <a:endParaRPr lang="en-US" sz="1200" dirty="0"/>
+          </a:p>
+        </p:txBody>
+      </p:sp>
     </p:spTree>
     <p:extLst>
       <p:ext uri="{BB962C8B-B14F-4D97-AF65-F5344CB8AC3E}">
